--- a/.lessons/21 Fundamental CRUD/10 Show A Specific Data/1.pptx
+++ b/.lessons/21 Fundamental CRUD/10 Show A Specific Data/1.pptx
@@ -9,6 +9,10 @@
     <p:sldId id="402" r:id="rId3"/>
     <p:sldId id="403" r:id="rId4"/>
     <p:sldId id="400" r:id="rId5"/>
+    <p:sldId id="404" r:id="rId6"/>
+    <p:sldId id="405" r:id="rId7"/>
+    <p:sldId id="406" r:id="rId8"/>
+    <p:sldId id="407" r:id="rId9"/>
   </p:sldIdLst>
   <p:sldSz cx="12192000" cy="6858000"/>
   <p:notesSz cx="6858000" cy="9144000"/>
@@ -262,7 +266,7 @@
           <a:p>
             <a:fld id="{3E102D2E-813C-461C-9963-687A650C48C0}" type="datetimeFigureOut">
               <a:rPr lang="en-US" smtClean="0"/>
-              <a:t>4/26/2025</a:t>
+              <a:t>5/20/2025</a:t>
             </a:fld>
             <a:endParaRPr lang="en-US"/>
           </a:p>
@@ -460,7 +464,7 @@
           <a:p>
             <a:fld id="{3E102D2E-813C-461C-9963-687A650C48C0}" type="datetimeFigureOut">
               <a:rPr lang="en-US" smtClean="0"/>
-              <a:t>4/26/2025</a:t>
+              <a:t>5/20/2025</a:t>
             </a:fld>
             <a:endParaRPr lang="en-US"/>
           </a:p>
@@ -668,7 +672,7 @@
           <a:p>
             <a:fld id="{3E102D2E-813C-461C-9963-687A650C48C0}" type="datetimeFigureOut">
               <a:rPr lang="en-US" smtClean="0"/>
-              <a:t>4/26/2025</a:t>
+              <a:t>5/20/2025</a:t>
             </a:fld>
             <a:endParaRPr lang="en-US"/>
           </a:p>
@@ -866,7 +870,7 @@
           <a:p>
             <a:fld id="{3E102D2E-813C-461C-9963-687A650C48C0}" type="datetimeFigureOut">
               <a:rPr lang="en-US" smtClean="0"/>
-              <a:t>4/26/2025</a:t>
+              <a:t>5/20/2025</a:t>
             </a:fld>
             <a:endParaRPr lang="en-US"/>
           </a:p>
@@ -1141,7 +1145,7 @@
           <a:p>
             <a:fld id="{3E102D2E-813C-461C-9963-687A650C48C0}" type="datetimeFigureOut">
               <a:rPr lang="en-US" smtClean="0"/>
-              <a:t>4/26/2025</a:t>
+              <a:t>5/20/2025</a:t>
             </a:fld>
             <a:endParaRPr lang="en-US"/>
           </a:p>
@@ -1406,7 +1410,7 @@
           <a:p>
             <a:fld id="{3E102D2E-813C-461C-9963-687A650C48C0}" type="datetimeFigureOut">
               <a:rPr lang="en-US" smtClean="0"/>
-              <a:t>4/26/2025</a:t>
+              <a:t>5/20/2025</a:t>
             </a:fld>
             <a:endParaRPr lang="en-US"/>
           </a:p>
@@ -1818,7 +1822,7 @@
           <a:p>
             <a:fld id="{3E102D2E-813C-461C-9963-687A650C48C0}" type="datetimeFigureOut">
               <a:rPr lang="en-US" smtClean="0"/>
-              <a:t>4/26/2025</a:t>
+              <a:t>5/20/2025</a:t>
             </a:fld>
             <a:endParaRPr lang="en-US"/>
           </a:p>
@@ -1959,7 +1963,7 @@
           <a:p>
             <a:fld id="{3E102D2E-813C-461C-9963-687A650C48C0}" type="datetimeFigureOut">
               <a:rPr lang="en-US" smtClean="0"/>
-              <a:t>4/26/2025</a:t>
+              <a:t>5/20/2025</a:t>
             </a:fld>
             <a:endParaRPr lang="en-US"/>
           </a:p>
@@ -2072,7 +2076,7 @@
           <a:p>
             <a:fld id="{3E102D2E-813C-461C-9963-687A650C48C0}" type="datetimeFigureOut">
               <a:rPr lang="en-US" smtClean="0"/>
-              <a:t>4/26/2025</a:t>
+              <a:t>5/20/2025</a:t>
             </a:fld>
             <a:endParaRPr lang="en-US"/>
           </a:p>
@@ -2383,7 +2387,7 @@
           <a:p>
             <a:fld id="{3E102D2E-813C-461C-9963-687A650C48C0}" type="datetimeFigureOut">
               <a:rPr lang="en-US" smtClean="0"/>
-              <a:t>4/26/2025</a:t>
+              <a:t>5/20/2025</a:t>
             </a:fld>
             <a:endParaRPr lang="en-US"/>
           </a:p>
@@ -2671,7 +2675,7 @@
           <a:p>
             <a:fld id="{3E102D2E-813C-461C-9963-687A650C48C0}" type="datetimeFigureOut">
               <a:rPr lang="en-US" smtClean="0"/>
-              <a:t>4/26/2025</a:t>
+              <a:t>5/20/2025</a:t>
             </a:fld>
             <a:endParaRPr lang="en-US"/>
           </a:p>
@@ -2912,7 +2916,7 @@
           <a:p>
             <a:fld id="{3E102D2E-813C-461C-9963-687A650C48C0}" type="datetimeFigureOut">
               <a:rPr lang="en-US" smtClean="0"/>
-              <a:t>4/26/2025</a:t>
+              <a:t>5/20/2025</a:t>
             </a:fld>
             <a:endParaRPr lang="en-US"/>
           </a:p>
@@ -3656,6 +3660,350 @@
 </p:sld>
 </file>
 
+<file path=ppt/slides/slide5.xml><?xml version="1.0" encoding="utf-8"?>
+<p:sld xmlns:a="http://schemas.openxmlformats.org/drawingml/2006/main" xmlns:r="http://schemas.openxmlformats.org/officeDocument/2006/relationships" xmlns:p="http://schemas.openxmlformats.org/presentationml/2006/main">
+  <p:cSld>
+    <p:spTree>
+      <p:nvGrpSpPr>
+        <p:cNvPr id="1" name="">
+          <a:extLst>
+            <a:ext uri="{FF2B5EF4-FFF2-40B4-BE49-F238E27FC236}">
+              <a16:creationId xmlns:a16="http://schemas.microsoft.com/office/drawing/2014/main" id="{D4C6BF0D-603F-DAB4-6CB9-4E8007292A36}"/>
+            </a:ext>
+          </a:extLst>
+        </p:cNvPr>
+        <p:cNvGrpSpPr/>
+        <p:nvPr/>
+      </p:nvGrpSpPr>
+      <p:grpSpPr>
+        <a:xfrm>
+          <a:off x="0" y="0"/>
+          <a:ext cx="0" cy="0"/>
+          <a:chOff x="0" y="0"/>
+          <a:chExt cx="0" cy="0"/>
+        </a:xfrm>
+      </p:grpSpPr>
+      <p:sp>
+        <p:nvSpPr>
+          <p:cNvPr id="3" name="TextBox 2">
+            <a:extLst>
+              <a:ext uri="{FF2B5EF4-FFF2-40B4-BE49-F238E27FC236}">
+                <a16:creationId xmlns:a16="http://schemas.microsoft.com/office/drawing/2014/main" id="{84ADB84A-0792-3EFA-8E43-C4AAC0754A20}"/>
+              </a:ext>
+            </a:extLst>
+          </p:cNvPr>
+          <p:cNvSpPr txBox="1"/>
+          <p:nvPr/>
+        </p:nvSpPr>
+        <p:spPr>
+          <a:xfrm>
+            <a:off x="217714" y="255046"/>
+            <a:ext cx="11756571" cy="355354"/>
+          </a:xfrm>
+          <a:prstGeom prst="rect">
+            <a:avLst/>
+          </a:prstGeom>
+          <a:noFill/>
+        </p:spPr>
+        <p:txBody>
+          <a:bodyPr wrap="square">
+            <a:spAutoFit/>
+          </a:bodyPr>
+          <a:lstStyle/>
+          <a:p>
+            <a:pPr>
+              <a:lnSpc>
+                <a:spcPct val="150000"/>
+              </a:lnSpc>
+              <a:buNone/>
+            </a:pPr>
+            <a:r>
+              <a:rPr kumimoji="0" lang="en-US" altLang="en-US" sz="1300" b="0" i="0" u="none" strike="noStrike" cap="none" normalizeH="0" baseline="0">
+                <a:ln>
+                  <a:noFill/>
+                </a:ln>
+                <a:solidFill>
+                  <a:schemeClr val="tx1"/>
+                </a:solidFill>
+                <a:effectLst/>
+                <a:latin typeface="Arial" panose="020B0604020202020204" pitchFamily="34" charset="0"/>
+              </a:rPr>
+              <a:t>.</a:t>
+            </a:r>
+          </a:p>
+        </p:txBody>
+      </p:sp>
+    </p:spTree>
+    <p:extLst>
+      <p:ext uri="{BB962C8B-B14F-4D97-AF65-F5344CB8AC3E}">
+        <p14:creationId xmlns:p14="http://schemas.microsoft.com/office/powerpoint/2010/main" val="2477538329"/>
+      </p:ext>
+    </p:extLst>
+  </p:cSld>
+  <p:clrMapOvr>
+    <a:masterClrMapping/>
+  </p:clrMapOvr>
+</p:sld>
+</file>
+
+<file path=ppt/slides/slide6.xml><?xml version="1.0" encoding="utf-8"?>
+<p:sld xmlns:a="http://schemas.openxmlformats.org/drawingml/2006/main" xmlns:r="http://schemas.openxmlformats.org/officeDocument/2006/relationships" xmlns:p="http://schemas.openxmlformats.org/presentationml/2006/main">
+  <p:cSld>
+    <p:spTree>
+      <p:nvGrpSpPr>
+        <p:cNvPr id="1" name="">
+          <a:extLst>
+            <a:ext uri="{FF2B5EF4-FFF2-40B4-BE49-F238E27FC236}">
+              <a16:creationId xmlns:a16="http://schemas.microsoft.com/office/drawing/2014/main" id="{E12793F7-B5D6-5957-A3BF-ED605E635E7D}"/>
+            </a:ext>
+          </a:extLst>
+        </p:cNvPr>
+        <p:cNvGrpSpPr/>
+        <p:nvPr/>
+      </p:nvGrpSpPr>
+      <p:grpSpPr>
+        <a:xfrm>
+          <a:off x="0" y="0"/>
+          <a:ext cx="0" cy="0"/>
+          <a:chOff x="0" y="0"/>
+          <a:chExt cx="0" cy="0"/>
+        </a:xfrm>
+      </p:grpSpPr>
+      <p:sp>
+        <p:nvSpPr>
+          <p:cNvPr id="3" name="TextBox 2">
+            <a:extLst>
+              <a:ext uri="{FF2B5EF4-FFF2-40B4-BE49-F238E27FC236}">
+                <a16:creationId xmlns:a16="http://schemas.microsoft.com/office/drawing/2014/main" id="{3931AF4F-C9CC-6080-3673-B95DB73348C5}"/>
+              </a:ext>
+            </a:extLst>
+          </p:cNvPr>
+          <p:cNvSpPr txBox="1"/>
+          <p:nvPr/>
+        </p:nvSpPr>
+        <p:spPr>
+          <a:xfrm>
+            <a:off x="217714" y="255046"/>
+            <a:ext cx="11756571" cy="355354"/>
+          </a:xfrm>
+          <a:prstGeom prst="rect">
+            <a:avLst/>
+          </a:prstGeom>
+          <a:noFill/>
+        </p:spPr>
+        <p:txBody>
+          <a:bodyPr wrap="square">
+            <a:spAutoFit/>
+          </a:bodyPr>
+          <a:lstStyle/>
+          <a:p>
+            <a:pPr>
+              <a:lnSpc>
+                <a:spcPct val="150000"/>
+              </a:lnSpc>
+              <a:buNone/>
+            </a:pPr>
+            <a:r>
+              <a:rPr kumimoji="0" lang="en-US" altLang="en-US" sz="1300" b="0" i="0" u="none" strike="noStrike" cap="none" normalizeH="0" baseline="0">
+                <a:ln>
+                  <a:noFill/>
+                </a:ln>
+                <a:solidFill>
+                  <a:schemeClr val="tx1"/>
+                </a:solidFill>
+                <a:effectLst/>
+                <a:latin typeface="Arial" panose="020B0604020202020204" pitchFamily="34" charset="0"/>
+              </a:rPr>
+              <a:t>.</a:t>
+            </a:r>
+          </a:p>
+        </p:txBody>
+      </p:sp>
+    </p:spTree>
+    <p:extLst>
+      <p:ext uri="{BB962C8B-B14F-4D97-AF65-F5344CB8AC3E}">
+        <p14:creationId xmlns:p14="http://schemas.microsoft.com/office/powerpoint/2010/main" val="2787840464"/>
+      </p:ext>
+    </p:extLst>
+  </p:cSld>
+  <p:clrMapOvr>
+    <a:masterClrMapping/>
+  </p:clrMapOvr>
+</p:sld>
+</file>
+
+<file path=ppt/slides/slide7.xml><?xml version="1.0" encoding="utf-8"?>
+<p:sld xmlns:a="http://schemas.openxmlformats.org/drawingml/2006/main" xmlns:r="http://schemas.openxmlformats.org/officeDocument/2006/relationships" xmlns:p="http://schemas.openxmlformats.org/presentationml/2006/main">
+  <p:cSld>
+    <p:spTree>
+      <p:nvGrpSpPr>
+        <p:cNvPr id="1" name="">
+          <a:extLst>
+            <a:ext uri="{FF2B5EF4-FFF2-40B4-BE49-F238E27FC236}">
+              <a16:creationId xmlns:a16="http://schemas.microsoft.com/office/drawing/2014/main" id="{B7633917-67ED-F5EC-8B31-0C8BE015DF78}"/>
+            </a:ext>
+          </a:extLst>
+        </p:cNvPr>
+        <p:cNvGrpSpPr/>
+        <p:nvPr/>
+      </p:nvGrpSpPr>
+      <p:grpSpPr>
+        <a:xfrm>
+          <a:off x="0" y="0"/>
+          <a:ext cx="0" cy="0"/>
+          <a:chOff x="0" y="0"/>
+          <a:chExt cx="0" cy="0"/>
+        </a:xfrm>
+      </p:grpSpPr>
+      <p:sp>
+        <p:nvSpPr>
+          <p:cNvPr id="3" name="TextBox 2">
+            <a:extLst>
+              <a:ext uri="{FF2B5EF4-FFF2-40B4-BE49-F238E27FC236}">
+                <a16:creationId xmlns:a16="http://schemas.microsoft.com/office/drawing/2014/main" id="{E2E3C8A6-3C3C-A3EF-D1DB-3DE30AA22ED5}"/>
+              </a:ext>
+            </a:extLst>
+          </p:cNvPr>
+          <p:cNvSpPr txBox="1"/>
+          <p:nvPr/>
+        </p:nvSpPr>
+        <p:spPr>
+          <a:xfrm>
+            <a:off x="217714" y="255046"/>
+            <a:ext cx="11756571" cy="355354"/>
+          </a:xfrm>
+          <a:prstGeom prst="rect">
+            <a:avLst/>
+          </a:prstGeom>
+          <a:noFill/>
+        </p:spPr>
+        <p:txBody>
+          <a:bodyPr wrap="square">
+            <a:spAutoFit/>
+          </a:bodyPr>
+          <a:lstStyle/>
+          <a:p>
+            <a:pPr>
+              <a:lnSpc>
+                <a:spcPct val="150000"/>
+              </a:lnSpc>
+              <a:buNone/>
+            </a:pPr>
+            <a:r>
+              <a:rPr kumimoji="0" lang="en-US" altLang="en-US" sz="1300" b="0" i="0" u="none" strike="noStrike" cap="none" normalizeH="0" baseline="0">
+                <a:ln>
+                  <a:noFill/>
+                </a:ln>
+                <a:solidFill>
+                  <a:schemeClr val="tx1"/>
+                </a:solidFill>
+                <a:effectLst/>
+                <a:latin typeface="Arial" panose="020B0604020202020204" pitchFamily="34" charset="0"/>
+              </a:rPr>
+              <a:t>.</a:t>
+            </a:r>
+          </a:p>
+        </p:txBody>
+      </p:sp>
+    </p:spTree>
+    <p:extLst>
+      <p:ext uri="{BB962C8B-B14F-4D97-AF65-F5344CB8AC3E}">
+        <p14:creationId xmlns:p14="http://schemas.microsoft.com/office/powerpoint/2010/main" val="693489478"/>
+      </p:ext>
+    </p:extLst>
+  </p:cSld>
+  <p:clrMapOvr>
+    <a:masterClrMapping/>
+  </p:clrMapOvr>
+</p:sld>
+</file>
+
+<file path=ppt/slides/slide8.xml><?xml version="1.0" encoding="utf-8"?>
+<p:sld xmlns:a="http://schemas.openxmlformats.org/drawingml/2006/main" xmlns:r="http://schemas.openxmlformats.org/officeDocument/2006/relationships" xmlns:p="http://schemas.openxmlformats.org/presentationml/2006/main">
+  <p:cSld>
+    <p:spTree>
+      <p:nvGrpSpPr>
+        <p:cNvPr id="1" name="">
+          <a:extLst>
+            <a:ext uri="{FF2B5EF4-FFF2-40B4-BE49-F238E27FC236}">
+              <a16:creationId xmlns:a16="http://schemas.microsoft.com/office/drawing/2014/main" id="{4F612C30-3DDA-FEE9-0A06-286F8ADB0FAD}"/>
+            </a:ext>
+          </a:extLst>
+        </p:cNvPr>
+        <p:cNvGrpSpPr/>
+        <p:nvPr/>
+      </p:nvGrpSpPr>
+      <p:grpSpPr>
+        <a:xfrm>
+          <a:off x="0" y="0"/>
+          <a:ext cx="0" cy="0"/>
+          <a:chOff x="0" y="0"/>
+          <a:chExt cx="0" cy="0"/>
+        </a:xfrm>
+      </p:grpSpPr>
+      <p:sp>
+        <p:nvSpPr>
+          <p:cNvPr id="3" name="TextBox 2">
+            <a:extLst>
+              <a:ext uri="{FF2B5EF4-FFF2-40B4-BE49-F238E27FC236}">
+                <a16:creationId xmlns:a16="http://schemas.microsoft.com/office/drawing/2014/main" id="{75BF1A71-0702-F6E6-1B39-DE52D3F3E3F8}"/>
+              </a:ext>
+            </a:extLst>
+          </p:cNvPr>
+          <p:cNvSpPr txBox="1"/>
+          <p:nvPr/>
+        </p:nvSpPr>
+        <p:spPr>
+          <a:xfrm>
+            <a:off x="217714" y="255046"/>
+            <a:ext cx="11756571" cy="355354"/>
+          </a:xfrm>
+          <a:prstGeom prst="rect">
+            <a:avLst/>
+          </a:prstGeom>
+          <a:noFill/>
+        </p:spPr>
+        <p:txBody>
+          <a:bodyPr wrap="square">
+            <a:spAutoFit/>
+          </a:bodyPr>
+          <a:lstStyle/>
+          <a:p>
+            <a:pPr>
+              <a:lnSpc>
+                <a:spcPct val="150000"/>
+              </a:lnSpc>
+              <a:buNone/>
+            </a:pPr>
+            <a:r>
+              <a:rPr kumimoji="0" lang="en-US" altLang="en-US" sz="1300" b="0" i="0" u="none" strike="noStrike" cap="none" normalizeH="0" baseline="0">
+                <a:ln>
+                  <a:noFill/>
+                </a:ln>
+                <a:solidFill>
+                  <a:schemeClr val="tx1"/>
+                </a:solidFill>
+                <a:effectLst/>
+                <a:latin typeface="Arial" panose="020B0604020202020204" pitchFamily="34" charset="0"/>
+              </a:rPr>
+              <a:t>.</a:t>
+            </a:r>
+          </a:p>
+        </p:txBody>
+      </p:sp>
+    </p:spTree>
+    <p:extLst>
+      <p:ext uri="{BB962C8B-B14F-4D97-AF65-F5344CB8AC3E}">
+        <p14:creationId xmlns:p14="http://schemas.microsoft.com/office/powerpoint/2010/main" val="3008943219"/>
+      </p:ext>
+    </p:extLst>
+  </p:cSld>
+  <p:clrMapOvr>
+    <a:masterClrMapping/>
+  </p:clrMapOvr>
+</p:sld>
+</file>
+
 <file path=ppt/theme/theme1.xml><?xml version="1.0" encoding="utf-8"?>
 <a:theme xmlns:a="http://schemas.openxmlformats.org/drawingml/2006/main" name="Office Theme">
   <a:themeElements>

--- a/.lessons/21 Fundamental CRUD/10 Show A Specific Data/1.pptx
+++ b/.lessons/21 Fundamental CRUD/10 Show A Specific Data/1.pptx
@@ -3354,7 +3354,7 @@
         <p:spPr>
           <a:xfrm>
             <a:off x="217714" y="255046"/>
-            <a:ext cx="11756571" cy="355354"/>
+            <a:ext cx="11756571" cy="955518"/>
           </a:xfrm>
           <a:prstGeom prst="rect">
             <a:avLst/>
@@ -3374,21 +3374,154 @@
               <a:buNone/>
             </a:pPr>
             <a:r>
-              <a:rPr kumimoji="0" lang="en-US" altLang="en-US" sz="1300" b="0" i="0" u="none" strike="noStrike" cap="none" normalizeH="0" baseline="0">
-                <a:ln>
-                  <a:noFill/>
-                </a:ln>
-                <a:solidFill>
-                  <a:schemeClr val="tx1"/>
-                </a:solidFill>
-                <a:effectLst/>
+              <a:rPr lang="en-US" altLang="en-US" sz="1300">
                 <a:latin typeface="Arial" panose="020B0604020202020204" pitchFamily="34" charset="0"/>
               </a:rPr>
-              <a:t>.</a:t>
-            </a:r>
-          </a:p>
-        </p:txBody>
-      </p:sp>
+              <a:t>Indi </a:t>
+            </a:r>
+            <a:r>
+              <a:rPr lang="en-US" altLang="en-US" sz="1300" b="1">
+                <a:solidFill>
+                  <a:srgbClr val="FF0000"/>
+                </a:solidFill>
+                <a:latin typeface="Arial" panose="020B0604020202020204" pitchFamily="34" charset="0"/>
+              </a:rPr>
+              <a:t>SHOW</a:t>
+            </a:r>
+            <a:r>
+              <a:rPr lang="en-US" altLang="en-US" sz="1300">
+                <a:latin typeface="Arial" panose="020B0604020202020204" pitchFamily="34" charset="0"/>
+              </a:rPr>
+              <a:t> </a:t>
+            </a:r>
+            <a:r>
+              <a:rPr lang="az-Latn-AZ" altLang="en-US" sz="1300">
+                <a:latin typeface="Arial" panose="020B0604020202020204" pitchFamily="34" charset="0"/>
+              </a:rPr>
+              <a:t>səhifəsini yaradacağıq. İlk öncə </a:t>
+            </a:r>
+            <a:r>
+              <a:rPr lang="en-US" altLang="en-US" sz="1300" b="1">
+                <a:latin typeface="Arial" panose="020B0604020202020204" pitchFamily="34" charset="0"/>
+              </a:rPr>
+              <a:t>show</a:t>
+            </a:r>
+            <a:r>
+              <a:rPr lang="en-US" altLang="en-US" sz="1300">
+                <a:latin typeface="Arial" panose="020B0604020202020204" pitchFamily="34" charset="0"/>
+              </a:rPr>
+              <a:t> </a:t>
+            </a:r>
+            <a:r>
+              <a:rPr lang="az-Latn-AZ" altLang="en-US" sz="1300">
+                <a:latin typeface="Arial" panose="020B0604020202020204" pitchFamily="34" charset="0"/>
+              </a:rPr>
+              <a:t>düyməsinə </a:t>
+            </a:r>
+            <a:r>
+              <a:rPr lang="az-Latn-AZ" altLang="en-US" sz="1300" b="1">
+                <a:latin typeface="Arial" panose="020B0604020202020204" pitchFamily="34" charset="0"/>
+              </a:rPr>
+              <a:t>route</a:t>
+            </a:r>
+            <a:r>
+              <a:rPr lang="az-Latn-AZ" altLang="en-US" sz="1300">
+                <a:latin typeface="Arial" panose="020B0604020202020204" pitchFamily="34" charset="0"/>
+              </a:rPr>
+              <a:t> təyin edirik. </a:t>
+            </a:r>
+          </a:p>
+          <a:p>
+            <a:pPr>
+              <a:lnSpc>
+                <a:spcPct val="150000"/>
+              </a:lnSpc>
+              <a:buNone/>
+            </a:pPr>
+            <a:endParaRPr lang="az-Latn-AZ" altLang="en-US" sz="1300">
+              <a:latin typeface="Arial" panose="020B0604020202020204" pitchFamily="34" charset="0"/>
+            </a:endParaRPr>
+          </a:p>
+          <a:p>
+            <a:pPr>
+              <a:lnSpc>
+                <a:spcPct val="150000"/>
+              </a:lnSpc>
+              <a:buNone/>
+            </a:pPr>
+            <a:r>
+              <a:rPr lang="az-Latn-AZ" altLang="en-US" sz="1300">
+                <a:latin typeface="Arial" panose="020B0604020202020204" pitchFamily="34" charset="0"/>
+              </a:rPr>
+              <a:t>Sonra </a:t>
+            </a:r>
+            <a:r>
+              <a:rPr lang="az-Latn-AZ" altLang="en-US" sz="1300" b="1">
+                <a:latin typeface="Arial" panose="020B0604020202020204" pitchFamily="34" charset="0"/>
+              </a:rPr>
+              <a:t>index.blade.php </a:t>
+            </a:r>
+            <a:r>
+              <a:rPr lang="az-Latn-AZ" altLang="en-US" sz="1300">
+                <a:latin typeface="Arial" panose="020B0604020202020204" pitchFamily="34" charset="0"/>
+              </a:rPr>
+              <a:t>faylındakı kodları </a:t>
+            </a:r>
+            <a:r>
+              <a:rPr lang="en-US" altLang="en-US" sz="1300" b="1">
+                <a:latin typeface="Arial" panose="020B0604020202020204" pitchFamily="34" charset="0"/>
+              </a:rPr>
+              <a:t>show.blade.php </a:t>
+            </a:r>
+            <a:r>
+              <a:rPr lang="az-Latn-AZ" altLang="en-US" sz="1300">
+                <a:latin typeface="Arial" panose="020B0604020202020204" pitchFamily="34" charset="0"/>
+              </a:rPr>
+              <a:t>faylına köçürürük. Növbəti slayd....</a:t>
+            </a:r>
+            <a:endParaRPr kumimoji="0" lang="en-US" altLang="en-US" sz="1300" b="0" i="0" u="none" strike="noStrike" cap="none" normalizeH="0" baseline="0">
+              <a:ln>
+                <a:noFill/>
+              </a:ln>
+              <a:solidFill>
+                <a:schemeClr val="tx1"/>
+              </a:solidFill>
+              <a:effectLst/>
+              <a:latin typeface="Arial" panose="020B0604020202020204" pitchFamily="34" charset="0"/>
+            </a:endParaRPr>
+          </a:p>
+        </p:txBody>
+      </p:sp>
+      <p:pic>
+        <p:nvPicPr>
+          <p:cNvPr id="6" name="Picture 5">
+            <a:extLst>
+              <a:ext uri="{FF2B5EF4-FFF2-40B4-BE49-F238E27FC236}">
+                <a16:creationId xmlns:a16="http://schemas.microsoft.com/office/drawing/2014/main" id="{CC7C2C5F-5DBF-1BC1-193D-244E1A2A2E3D}"/>
+              </a:ext>
+            </a:extLst>
+          </p:cNvPr>
+          <p:cNvPicPr>
+            <a:picLocks noChangeAspect="1"/>
+          </p:cNvPicPr>
+          <p:nvPr/>
+        </p:nvPicPr>
+        <p:blipFill>
+          <a:blip r:embed="rId2"/>
+          <a:stretch>
+            <a:fillRect/>
+          </a:stretch>
+        </p:blipFill>
+        <p:spPr>
+          <a:xfrm>
+            <a:off x="5081047" y="1505964"/>
+            <a:ext cx="7110953" cy="5352036"/>
+          </a:xfrm>
+          <a:prstGeom prst="rect">
+            <a:avLst/>
+          </a:prstGeom>
+        </p:spPr>
+      </p:pic>
     </p:spTree>
     <p:extLst>
       <p:ext uri="{BB962C8B-B14F-4D97-AF65-F5344CB8AC3E}">
@@ -3470,11 +3603,64 @@
                 <a:effectLst/>
                 <a:latin typeface="Arial" panose="020B0604020202020204" pitchFamily="34" charset="0"/>
               </a:rPr>
-              <a:t>.</a:t>
-            </a:r>
-          </a:p>
-        </p:txBody>
-      </p:sp>
+              <a:t>show </a:t>
+            </a:r>
+            <a:r>
+              <a:rPr kumimoji="0" lang="az-Latn-AZ" altLang="en-US" sz="1300" b="0" i="0" u="none" strike="noStrike" cap="none" normalizeH="0" baseline="0">
+                <a:ln>
+                  <a:noFill/>
+                </a:ln>
+                <a:solidFill>
+                  <a:schemeClr val="tx1"/>
+                </a:solidFill>
+                <a:effectLst/>
+                <a:latin typeface="Arial" panose="020B0604020202020204" pitchFamily="34" charset="0"/>
+              </a:rPr>
+              <a:t>səhifəsini bu forma yığırıq.</a:t>
+            </a:r>
+            <a:endParaRPr kumimoji="0" lang="en-US" altLang="en-US" sz="1300" b="0" i="0" u="none" strike="noStrike" cap="none" normalizeH="0" baseline="0">
+              <a:ln>
+                <a:noFill/>
+              </a:ln>
+              <a:solidFill>
+                <a:schemeClr val="tx1"/>
+              </a:solidFill>
+              <a:effectLst/>
+              <a:latin typeface="Arial" panose="020B0604020202020204" pitchFamily="34" charset="0"/>
+            </a:endParaRPr>
+          </a:p>
+        </p:txBody>
+      </p:sp>
+      <p:pic>
+        <p:nvPicPr>
+          <p:cNvPr id="4" name="Picture 3">
+            <a:extLst>
+              <a:ext uri="{FF2B5EF4-FFF2-40B4-BE49-F238E27FC236}">
+                <a16:creationId xmlns:a16="http://schemas.microsoft.com/office/drawing/2014/main" id="{F903B986-1460-D442-9F5A-389CAE6A65FD}"/>
+              </a:ext>
+            </a:extLst>
+          </p:cNvPr>
+          <p:cNvPicPr>
+            <a:picLocks noChangeAspect="1"/>
+          </p:cNvPicPr>
+          <p:nvPr/>
+        </p:nvPicPr>
+        <p:blipFill>
+          <a:blip r:embed="rId2"/>
+          <a:stretch>
+            <a:fillRect/>
+          </a:stretch>
+        </p:blipFill>
+        <p:spPr>
+          <a:xfrm>
+            <a:off x="5463261" y="0"/>
+            <a:ext cx="6728739" cy="6858000"/>
+          </a:xfrm>
+          <a:prstGeom prst="rect">
+            <a:avLst/>
+          </a:prstGeom>
+        </p:spPr>
+      </p:pic>
     </p:spTree>
     <p:extLst>
       <p:ext uri="{BB962C8B-B14F-4D97-AF65-F5344CB8AC3E}">
@@ -3546,21 +3732,66 @@
               <a:buNone/>
             </a:pPr>
             <a:r>
-              <a:rPr kumimoji="0" lang="en-US" altLang="en-US" sz="1300" b="0" i="0" u="none" strike="noStrike" cap="none" normalizeH="0" baseline="0">
-                <a:ln>
-                  <a:noFill/>
-                </a:ln>
-                <a:solidFill>
-                  <a:schemeClr val="tx1"/>
-                </a:solidFill>
-                <a:effectLst/>
+              <a:rPr lang="az-Latn-AZ" altLang="en-US" sz="1300">
                 <a:latin typeface="Arial" panose="020B0604020202020204" pitchFamily="34" charset="0"/>
               </a:rPr>
-              <a:t>.</a:t>
-            </a:r>
-          </a:p>
-        </p:txBody>
-      </p:sp>
+              <a:t>Buda </a:t>
+            </a:r>
+            <a:r>
+              <a:rPr lang="en-US" altLang="en-US" sz="1300">
+                <a:latin typeface="Arial" panose="020B0604020202020204" pitchFamily="34" charset="0"/>
+              </a:rPr>
+              <a:t>SHOW </a:t>
+            </a:r>
+            <a:r>
+              <a:rPr lang="az-Latn-AZ" altLang="en-US" sz="1300">
+                <a:latin typeface="Arial" panose="020B0604020202020204" pitchFamily="34" charset="0"/>
+              </a:rPr>
+              <a:t>səhifəsinə göndərdiyimiz datalar.</a:t>
+            </a:r>
+            <a:endParaRPr kumimoji="0" lang="en-US" altLang="en-US" sz="1300" b="0" i="0" u="none" strike="noStrike" cap="none" normalizeH="0" baseline="0">
+              <a:ln>
+                <a:noFill/>
+              </a:ln>
+              <a:solidFill>
+                <a:schemeClr val="tx1"/>
+              </a:solidFill>
+              <a:effectLst/>
+              <a:latin typeface="Arial" panose="020B0604020202020204" pitchFamily="34" charset="0"/>
+            </a:endParaRPr>
+          </a:p>
+        </p:txBody>
+      </p:sp>
+      <p:pic>
+        <p:nvPicPr>
+          <p:cNvPr id="4" name="Picture 3">
+            <a:extLst>
+              <a:ext uri="{FF2B5EF4-FFF2-40B4-BE49-F238E27FC236}">
+                <a16:creationId xmlns:a16="http://schemas.microsoft.com/office/drawing/2014/main" id="{68236446-F80C-55CE-277F-2CE757C2D3D4}"/>
+              </a:ext>
+            </a:extLst>
+          </p:cNvPr>
+          <p:cNvPicPr>
+            <a:picLocks noChangeAspect="1"/>
+          </p:cNvPicPr>
+          <p:nvPr/>
+        </p:nvPicPr>
+        <p:blipFill>
+          <a:blip r:embed="rId2"/>
+          <a:stretch>
+            <a:fillRect/>
+          </a:stretch>
+        </p:blipFill>
+        <p:spPr>
+          <a:xfrm>
+            <a:off x="7543151" y="1370834"/>
+            <a:ext cx="4648849" cy="5487166"/>
+          </a:xfrm>
+          <a:prstGeom prst="rect">
+            <a:avLst/>
+          </a:prstGeom>
+        </p:spPr>
+      </p:pic>
     </p:spTree>
     <p:extLst>
       <p:ext uri="{BB962C8B-B14F-4D97-AF65-F5344CB8AC3E}">
